--- a/apps/resources/bundled_files/5-klass-kadimki-bolchoktor-sabak.pptx
+++ b/apps/resources/bundled_files/5-klass-kadimki-bolchoktor-sabak.pptx
@@ -5196,7 +5196,7 @@
                 </a:solidFill>
                 <a:latin typeface="PT Sans"/>
               </a:rPr>
-              <a:t>5-класс · Математика</a:t>
+              <a:t/>
             </a:r>
           </a:p>
         </p:txBody>
@@ -5688,7 +5688,7 @@
                 </a:solidFill>
                 <a:latin typeface="PT Sans"/>
               </a:rPr>
-              <a:t>5-класс ›</a:t>
+              <a:t/>
             </a:r>
           </a:p>
           <a:p>
@@ -6637,7 +6637,7 @@
                 </a:solidFill>
                 <a:latin typeface="PT Sans"/>
               </a:rPr>
-              <a:t>5-класс ›</a:t>
+              <a:t/>
             </a:r>
           </a:p>
           <a:p>
@@ -9740,7 +9740,7 @@
                 </a:solidFill>
                 <a:latin typeface="PT Sans"/>
               </a:rPr>
-              <a:t>5-класс ›</a:t>
+              <a:t/>
             </a:r>
           </a:p>
           <a:p>
@@ -12917,7 +12917,7 @@
                 </a:solidFill>
                 <a:latin typeface="PT Sans"/>
               </a:rPr>
-              <a:t>5-класс ›</a:t>
+              <a:t/>
             </a:r>
           </a:p>
           <a:p>
@@ -14247,7 +14247,7 @@
                 </a:solidFill>
                 <a:latin typeface="PT Sans"/>
               </a:rPr>
-              <a:t>5-класс ›</a:t>
+              <a:t/>
             </a:r>
           </a:p>
           <a:p>
@@ -14959,7 +14959,7 @@
                 </a:solidFill>
                 <a:latin typeface="PT Sans"/>
               </a:rPr>
-              <a:t>5-класс ›</a:t>
+              <a:t/>
             </a:r>
           </a:p>
           <a:p>
@@ -15632,7 +15632,7 @@
                 </a:solidFill>
                 <a:latin typeface="PT Sans"/>
               </a:rPr>
-              <a:t>5-класс ›</a:t>
+              <a:t/>
             </a:r>
           </a:p>
           <a:p>
@@ -17181,7 +17181,7 @@
                 </a:solidFill>
                 <a:latin typeface="PT Sans"/>
               </a:rPr>
-              <a:t>5-класс ›</a:t>
+              <a:t/>
             </a:r>
           </a:p>
           <a:p>
@@ -18265,7 +18265,7 @@
                 </a:solidFill>
                 <a:latin typeface="PT Sans"/>
               </a:rPr>
-              <a:t>5-класс ›</a:t>
+              <a:t/>
             </a:r>
           </a:p>
           <a:p>
@@ -19795,7 +19795,7 @@
                 </a:solidFill>
                 <a:latin typeface="PT Sans"/>
               </a:rPr>
-              <a:t>5-класс ›</a:t>
+              <a:t/>
             </a:r>
           </a:p>
           <a:p>
@@ -22147,7 +22147,7 @@
                 </a:solidFill>
                 <a:latin typeface="PT Sans"/>
               </a:rPr>
-              <a:t>5-класс ›</a:t>
+              <a:t/>
             </a:r>
           </a:p>
           <a:p>
@@ -23424,7 +23424,7 @@
                 </a:solidFill>
                 <a:latin typeface="PT Sans"/>
               </a:rPr>
-              <a:t>5-класс ›</a:t>
+              <a:t/>
             </a:r>
           </a:p>
           <a:p>
@@ -24852,7 +24852,7 @@
                 </a:solidFill>
                 <a:latin typeface="PT Sans"/>
               </a:rPr>
-              <a:t>5-класс ›</a:t>
+              <a:t/>
             </a:r>
           </a:p>
           <a:p>
@@ -26308,7 +26308,7 @@
                 </a:solidFill>
                 <a:latin typeface="PT Sans"/>
               </a:rPr>
-              <a:t>5-класс ›</a:t>
+              <a:t/>
             </a:r>
           </a:p>
           <a:p>
@@ -27710,7 +27710,7 @@
                 </a:solidFill>
                 <a:latin typeface="PT Sans"/>
               </a:rPr>
-              <a:t>5-класс ›</a:t>
+              <a:t/>
             </a:r>
           </a:p>
           <a:p>
@@ -28510,7 +28510,7 @@
                 </a:solidFill>
                 <a:latin typeface="PT Sans"/>
               </a:rPr>
-              <a:t>5-класс ›</a:t>
+              <a:t/>
             </a:r>
           </a:p>
           <a:p>
@@ -29351,7 +29351,7 @@
                 </a:solidFill>
                 <a:latin typeface="PT Sans"/>
               </a:rPr>
-              <a:t>5-класс ›</a:t>
+              <a:t/>
             </a:r>
           </a:p>
           <a:p>
@@ -30300,7 +30300,7 @@
                 </a:solidFill>
                 <a:latin typeface="PT Sans"/>
               </a:rPr>
-              <a:t>5-класс ›</a:t>
+              <a:t/>
             </a:r>
           </a:p>
           <a:p>
@@ -31754,7 +31754,7 @@
                 </a:solidFill>
                 <a:latin typeface="PT Sans"/>
               </a:rPr>
-              <a:t>5-класс ›</a:t>
+              <a:t/>
             </a:r>
           </a:p>
           <a:p>
@@ -32500,7 +32500,7 @@
                 </a:solidFill>
                 <a:latin typeface="PT Sans"/>
               </a:rPr>
-              <a:t>5-класс ›</a:t>
+              <a:t/>
             </a:r>
           </a:p>
           <a:p>
@@ -33308,7 +33308,7 @@
                 </a:solidFill>
                 <a:latin typeface="PT Sans"/>
               </a:rPr>
-              <a:t>5-класс ›</a:t>
+              <a:t/>
             </a:r>
           </a:p>
           <a:p>
@@ -34499,7 +34499,7 @@
                 </a:solidFill>
                 <a:latin typeface="PT Sans"/>
               </a:rPr>
-              <a:t>5-класс ›</a:t>
+              <a:t/>
             </a:r>
           </a:p>
           <a:p>
@@ -35694,7 +35694,7 @@
                 </a:solidFill>
                 <a:latin typeface="PT Sans"/>
               </a:rPr>
-              <a:t>5-класс ›</a:t>
+              <a:t/>
             </a:r>
           </a:p>
           <a:p>
@@ -35875,7 +35875,7 @@
                 </a:solidFill>
                 <a:latin typeface="PT Sans"/>
               </a:rPr>
-              <a:t>3-класс</a:t>
+              <a:t/>
             </a:r>
           </a:p>
         </p:txBody>
@@ -36055,7 +36055,7 @@
                 </a:solidFill>
                 <a:latin typeface="PT Sans"/>
               </a:rPr>
-              <a:t>4-класс</a:t>
+              <a:t/>
             </a:r>
           </a:p>
         </p:txBody>
@@ -36216,7 +36216,7 @@
                 </a:solidFill>
                 <a:latin typeface="PT Sans"/>
               </a:rPr>
-              <a:t>5-класс</a:t>
+              <a:t/>
             </a:r>
           </a:p>
         </p:txBody>
@@ -36452,7 +36452,7 @@
                 </a:solidFill>
                 <a:latin typeface="PT Sans"/>
               </a:rPr>
-              <a:t>6-класс</a:t>
+              <a:t/>
             </a:r>
           </a:p>
         </p:txBody>
@@ -36872,7 +36872,7 @@
                 </a:solidFill>
                 <a:latin typeface="PT Sans"/>
               </a:rPr>
-              <a:t>5-класс ›</a:t>
+              <a:t/>
             </a:r>
           </a:p>
           <a:p>
@@ -38020,7 +38020,7 @@
                 </a:solidFill>
                 <a:latin typeface="PT Sans"/>
               </a:rPr>
-              <a:t>5-класс ›</a:t>
+              <a:t/>
             </a:r>
           </a:p>
           <a:p>

--- a/apps/resources/bundled_files/5-klass-kadimki-bolchoktor-sabak.pptx
+++ b/apps/resources/bundled_files/5-klass-kadimki-bolchoktor-sabak.pptx
@@ -1582,7 +1582,7 @@
           <a:lstStyle/>
           <a:p>
             <a:r>
-              <a:t>Ой жүгүртүү маданияты (Wenxi Lee, 2.6).</a:t>
+              <a:t>Ой жүгүртүү маданияты (Wenxi Lee, 2,6).</a:t>
             </a:r>
           </a:p>
         </p:txBody>
